--- a/it/slides/00-Architettura_dei_Calcolatori-Introduzione_al_Corso-Lab.pptx
+++ b/it/slides/00-Architettura_dei_Calcolatori-Introduzione_al_Corso-Lab.pptx
@@ -116,24 +116,24 @@
   <p:extLst>
     <p:ext uri="{521415D9-36F7-43E2-AB2F-B90AF26B5E84}">
       <p14:sectionLst xmlns:p14="http://schemas.microsoft.com/office/powerpoint/2010/main">
-        <p14:section name="Apertura" id="{14465480-b092-440e-72b8-03459315076c}">
+        <p14:section name="Apertura" id="{3401ce6b-8369-8b4f-b8da-6b67e4bd0052}">
           <p14:sldIdLst>
             <p14:sldId id="256"/>
             <p14:sldId id="257"/>
           </p14:sldIdLst>
         </p14:section>
-        <p14:section name="Materiale e primo contatto" id="{ac4b8e82-2491-3fa3-b04a-c556245d668b}">
+        <p14:section name="Materiale e primo contatto" id="{d9f31408-1bbf-35a8-1874-8954b005c50e}">
           <p14:sldIdLst>
             <p14:sldId id="258"/>
           </p14:sldIdLst>
         </p14:section>
-        <p14:section name="Il programma completo" id="{45e1b4e4-ea68-ab15-6b19-2c649c00dadc}">
+        <p14:section name="Il programma completo" id="{b758fed2-8b02-fbf2-0b34-6d42e4c849cd}">
           <p14:sldIdLst>
             <p14:sldId id="259"/>
             <p14:sldId id="260"/>
           </p14:sldIdLst>
         </p14:section>
-        <p14:section name="Eseguire e provare" id="{2d9cd1b4-61c8-9d78-f528-6ef6a30004ce}">
+        <p14:section name="Eseguire e provare" id="{ed47257d-77b4-6dce-0ed4-5782cb3d4687}">
           <p14:sldIdLst>
             <p14:sldId id="261"/>
             <p14:sldId id="262"/>
@@ -547,6 +547,7 @@
             <a:r>
               <a:rPr lang="en-US" dirty="0"/>
               <a:t>Questa è la presentazione del codice della Lezione 00. Mentre la presentazione della lezione sviluppa i concetti, questa raccoglie tutto ciò che si scrive e si esegue: ogni listato con il suo commento, il programma completo della lezione, il risultato che deve produrre, e la procedura per provarlo su ciascuno dei tre host. Le due presentazioni vanno lette insieme: i concetti spiegano il codice, e il codice dà ai concetti una conseguenza osservabile.
+Per chi non ha mai programmato, alcune parole che questa presentazione usa. Il codice sorgente di un programma è il testo che una persona scrive. Il repository è la cartella online, su GitHub, in cui è conservato tutto il codice sorgente del corso insieme alla sua storia. La toolchain è l'insieme dei programmi che traducono il sorgente in una cartuccia. Il terminale è una finestra in cui si scrivono comandi invece di fare clic. Una porta, come la 8080, è una porta numerata attraverso cui un programma riceve messaggi da un altro. La memoria flash è quella che mantiene il contenuto anche senza alimentazione, come in una chiavetta USB. Nulla di questo va padroneggiato oggi: la Lezione 01 installa gli strumenti e insegna il terminale passo per passo, e la Lezione 02 insegna a leggere ogni riga del programma mostrato qui.
 Stato di apprendimento: DA COMPRENDERE OGGI, alla fine di questa lezione lo spiegate, lo seguite passo passo e lo applicate da soli; DA UTILIZZARE OGGI, oggi seguite e usate la ricetta; come funziona dentro si spiega più avanti, o non fa parte del corso; DA COMPRENDERE PIÙ AVANTI, riconoscete il nome e lo scopo; lo spiega una lezione successiva. Una slide senza etichetta è contesto: una storia, un esempio, una domanda, un esercizio.
 Stato di apprendimento di questa lezione. DA COMPRENDERE OGGI: il metodo: prima il programma; le regole del corso. DA UTILIZZARE OGGI: il programma completo, gli strumenti di PRG32 (si usa, non si studia, in questo corso). DA COMPRENDERE PIÙ AVANTI: i componenti di PRG32 (Lezione 01); RISC e un ISA aperto (Lezione 03); il progetto Verm1 (Lezione 07). Una slide senza etichetta è contesto: una storia, un esempio, una domanda, un esercizio.</a:t>
             </a:r>

--- a/it/slides/00-Architettura_dei_Calcolatori-Introduzione_al_Corso-Lab.pptx
+++ b/it/slides/00-Architettura_dei_Calcolatori-Introduzione_al_Corso-Lab.pptx
@@ -116,24 +116,24 @@
   <p:extLst>
     <p:ext uri="{521415D9-36F7-43E2-AB2F-B90AF26B5E84}">
       <p14:sectionLst xmlns:p14="http://schemas.microsoft.com/office/powerpoint/2010/main">
-        <p14:section name="Apertura" id="{3401ce6b-8369-8b4f-b8da-6b67e4bd0052}">
+        <p14:section name="Apertura" id="{096c4bb7-321d-36ff-9174-f7d8a84f7442}">
           <p14:sldIdLst>
             <p14:sldId id="256"/>
             <p14:sldId id="257"/>
           </p14:sldIdLst>
         </p14:section>
-        <p14:section name="Materiale e primo contatto" id="{d9f31408-1bbf-35a8-1874-8954b005c50e}">
+        <p14:section name="Materiale e primo contatto" id="{3e72dbe2-08ef-dfb2-8a87-e4e00d067411}">
           <p14:sldIdLst>
             <p14:sldId id="258"/>
           </p14:sldIdLst>
         </p14:section>
-        <p14:section name="Il programma completo" id="{b758fed2-8b02-fbf2-0b34-6d42e4c849cd}">
+        <p14:section name="Il programma completo" id="{6dc06da8-3ffe-50b1-9f6f-ea489fc252d6}">
           <p14:sldIdLst>
             <p14:sldId id="259"/>
             <p14:sldId id="260"/>
           </p14:sldIdLst>
         </p14:section>
-        <p14:section name="Eseguire e provare" id="{ed47257d-77b4-6dce-0ed4-5782cb3d4687}">
+        <p14:section name="Eseguire e provare" id="{addd6f0a-2ce2-023f-dc9b-1eea80249989}">
           <p14:sldIdLst>
             <p14:sldId id="261"/>
             <p14:sldId id="262"/>
@@ -549,7 +549,8 @@
               <a:t>Questa è la presentazione del codice della Lezione 00. Mentre la presentazione della lezione sviluppa i concetti, questa raccoglie tutto ciò che si scrive e si esegue: ogni listato con il suo commento, il programma completo della lezione, il risultato che deve produrre, e la procedura per provarlo su ciascuno dei tre host. Le due presentazioni vanno lette insieme: i concetti spiegano il codice, e il codice dà ai concetti una conseguenza osservabile.
 Per chi non ha mai programmato, alcune parole che questa presentazione usa. Il codice sorgente di un programma è il testo che una persona scrive. Il repository è la cartella online, su GitHub, in cui è conservato tutto il codice sorgente del corso insieme alla sua storia. La toolchain è l'insieme dei programmi che traducono il sorgente in una cartuccia. Il terminale è una finestra in cui si scrivono comandi invece di fare clic. Una porta, come la 8080, è una porta numerata attraverso cui un programma riceve messaggi da un altro. La memoria flash è quella che mantiene il contenuto anche senza alimentazione, come in una chiavetta USB. Nulla di questo va padroneggiato oggi: la Lezione 01 installa gli strumenti e insegna il terminale passo per passo, e la Lezione 02 insegna a leggere ogni riga del programma mostrato qui.
 Stato di apprendimento: DA COMPRENDERE OGGI, alla fine di questa lezione lo spiegate, lo seguite passo passo e lo applicate da soli; DA UTILIZZARE OGGI, oggi seguite e usate la ricetta; come funziona dentro si spiega più avanti, o non fa parte del corso; DA COMPRENDERE PIÙ AVANTI, riconoscete il nome e lo scopo; lo spiega una lezione successiva. Una slide senza etichetta è contesto: una storia, un esempio, una domanda, un esercizio.
-Stato di apprendimento di questa lezione. DA COMPRENDERE OGGI: il metodo: prima il programma; le regole del corso. DA UTILIZZARE OGGI: il programma completo, gli strumenti di PRG32 (si usa, non si studia, in questo corso). DA COMPRENDERE PIÙ AVANTI: i componenti di PRG32 (Lezione 01); RISC e un ISA aperto (Lezione 03); il progetto Verm1 (Lezione 07). Una slide senza etichetta è contesto: una storia, un esempio, una domanda, un esercizio.</a:t>
+Stato di apprendimento di questa lezione. DA COMPRENDERE OGGI: il metodo: prima il programma; le regole del corso. DA UTILIZZARE OGGI: il programma completo, gli strumenti di PRG32 (si usa, non si studia, in questo corso). DA COMPRENDERE PIÙ AVANTI: i componenti di PRG32 (Lezione 01); RISC e un ISA aperto (Lezione 03); il progetto Verm1 (Lezione 07). Una slide senza etichetta è contesto: una storia, un esempio, una domanda, un esercizio.
+Percorso. I risultati di oggi: (1) descrivere i quattro passi della spirale di apprendimento e dire perché la previsione viene prima dell'esecuzione; (2) enunciare le regole di valutazione: una prova intercorso, due parti d'esame da superare entrambe, nessun dispositivo e nessuna IA. Si appoggia su: niente: è la prima lezione. Prossimo passo: Lezione 01, PRG32 e PRG32-QT: allestire la propria officina.</a:t>
             </a:r>
             <a:endParaRPr lang="en-US" dirty="0"/>
           </a:p>
